--- a/docs/reports/yc-agent-usecases-executive.pptx
+++ b/docs/reports/yc-agent-usecases-executive.pptx
@@ -10777,7 +10777,7 @@
                 </a:solidFill>
                 <a:latin typeface="Calibri"/>
               </a:rPr>
-              <a:t>Airweave · Kaelio · Capacitive</a:t>
+              <a:t>Airweave · Kaelio · Scalar Field</a:t>
             </a:r>
           </a:p>
         </p:txBody>
@@ -20523,7 +20523,7 @@
                 </a:solidFill>
                 <a:latin typeface="Calibri"/>
               </a:rPr>
-              <a:t>Capacitive</a:t>
+              <a:t>Alpha Research</a:t>
             </a:r>
           </a:p>
         </p:txBody>
@@ -20565,7 +20565,7 @@
                 </a:solidFill>
                 <a:latin typeface="Calibri"/>
               </a:rPr>
-              <a:t>The data gateway for agents in test pipelines.</a:t>
+              <a:t>Open-source agentic knowledge bases used across engineering.</a:t>
             </a:r>
           </a:p>
         </p:txBody>
@@ -22777,7 +22777,7 @@
                 </a:solidFill>
                 <a:latin typeface="Calibri"/>
               </a:rPr>
-              <a:t>Capacitive</a:t>
+              <a:t>Scalar Field</a:t>
             </a:r>
           </a:p>
         </p:txBody>
@@ -22819,7 +22819,7 @@
                 </a:solidFill>
                 <a:latin typeface="Calibri"/>
               </a:rPr>
-              <a:t>The data gateway for agents.</a:t>
+              <a:t>An agentic trading desk built on its own data/context layer.</a:t>
             </a:r>
           </a:p>
         </p:txBody>
@@ -27868,90 +27868,6 @@
         </p:nvSpPr>
         <p:spPr>
           <a:xfrm>
-            <a:off x="8348472" y="3986784"/>
-            <a:ext cx="3660343" cy="274320"/>
-          </a:xfrm>
-          <a:prstGeom prst="rect">
-            <a:avLst/>
-          </a:prstGeom>
-          <a:noFill/>
-        </p:spPr>
-        <p:txBody>
-          <a:bodyPr wrap="square" anchor="t" lIns="0" rIns="0" tIns="0" bIns="0">
-            <a:noAutofit/>
-          </a:bodyPr>
-          <a:lstStyle/>
-          <a:p>
-            <a:pPr algn="l">
-              <a:lnSpc>
-                <a:spcPct val="105000"/>
-              </a:lnSpc>
-              <a:spcBef>
-                <a:spcPts val="0"/>
-              </a:spcBef>
-            </a:pPr>
-            <a:r>
-              <a:rPr sz="1450" b="1" i="0">
-                <a:solidFill>
-                  <a:srgbClr val="FFFFFF"/>
-                </a:solidFill>
-                <a:latin typeface="Calibri"/>
-              </a:rPr>
-              <a:t>Capacitive</a:t>
-            </a:r>
-          </a:p>
-        </p:txBody>
-      </p:sp>
-      <p:sp>
-        <p:nvSpPr>
-          <p:cNvPr id="50" name="TextBox 49"/>
-          <p:cNvSpPr txBox="1"/>
-          <p:nvPr/>
-        </p:nvSpPr>
-        <p:spPr>
-          <a:xfrm>
-            <a:off x="8348472" y="4261104"/>
-            <a:ext cx="3614623" cy="566928"/>
-          </a:xfrm>
-          <a:prstGeom prst="rect">
-            <a:avLst/>
-          </a:prstGeom>
-          <a:noFill/>
-        </p:spPr>
-        <p:txBody>
-          <a:bodyPr wrap="square" anchor="t" lIns="0" rIns="0" tIns="0" bIns="0">
-            <a:normAutofit/>
-          </a:bodyPr>
-          <a:lstStyle/>
-          <a:p>
-            <a:pPr algn="l">
-              <a:lnSpc>
-                <a:spcPct val="100000"/>
-              </a:lnSpc>
-              <a:spcBef>
-                <a:spcPts val="0"/>
-              </a:spcBef>
-            </a:pPr>
-            <a:r>
-              <a:rPr sz="1050" b="0" i="0">
-                <a:solidFill>
-                  <a:srgbClr val="E0F7F1"/>
-                </a:solidFill>
-                <a:latin typeface="Calibri"/>
-              </a:rPr>
-              <a:t>The data gateway controlling agent access.</a:t>
-            </a:r>
-          </a:p>
-        </p:txBody>
-      </p:sp>
-      <p:sp>
-        <p:nvSpPr>
-          <p:cNvPr id="51" name="TextBox 50"/>
-          <p:cNvSpPr txBox="1"/>
-          <p:nvPr/>
-        </p:nvSpPr>
-        <p:spPr>
-          <a:xfrm>
             <a:off x="548640" y="6473952"/>
             <a:ext cx="7315200" cy="274320"/>
           </a:xfrm>
@@ -27988,7 +27904,7 @@
       </p:sp>
       <p:sp>
         <p:nvSpPr>
-          <p:cNvPr id="52" name="TextBox 51"/>
+          <p:cNvPr id="50" name="TextBox 49"/>
           <p:cNvSpPr txBox="1"/>
           <p:nvPr/>
         </p:nvSpPr>
@@ -33030,26 +32946,26 @@
         </p:spPr>
         <p:txBody>
           <a:bodyPr wrap="square" anchor="t" lIns="0" rIns="0" tIns="0" bIns="0">
-            <a:noAutofit/>
-          </a:bodyPr>
-          <a:lstStyle/>
-          <a:p>
-            <a:pPr algn="l">
-              <a:lnSpc>
-                <a:spcPct val="105000"/>
-              </a:lnSpc>
-              <a:spcBef>
-                <a:spcPts val="0"/>
-              </a:spcBef>
-            </a:pPr>
-            <a:r>
-              <a:rPr sz="1300" b="1" i="0">
+            <a:normAutofit/>
+          </a:bodyPr>
+          <a:lstStyle/>
+          <a:p>
+            <a:pPr algn="l">
+              <a:lnSpc>
+                <a:spcPct val="105000"/>
+              </a:lnSpc>
+              <a:spcBef>
+                <a:spcPts val="0"/>
+              </a:spcBef>
+            </a:pPr>
+            <a:r>
+              <a:rPr sz="1200" b="1" i="0">
                 <a:solidFill>
                   <a:srgbClr val="009B82"/>
                 </a:solidFill>
                 <a:latin typeface="Calibri"/>
               </a:rPr>
-              <a:t>ORGANIZATIONS REALIZING THIS</a:t>
+              <a:t>ORGANIZATIONS REALIZING THIS  ·  ADJACENCY — YC BATCHES VARY</a:t>
             </a:r>
           </a:p>
         </p:txBody>
@@ -33940,26 +33856,26 @@
         </p:spPr>
         <p:txBody>
           <a:bodyPr wrap="square" anchor="t" lIns="0" rIns="0" tIns="0" bIns="0">
-            <a:noAutofit/>
-          </a:bodyPr>
-          <a:lstStyle/>
-          <a:p>
-            <a:pPr algn="l">
-              <a:lnSpc>
-                <a:spcPct val="105000"/>
-              </a:lnSpc>
-              <a:spcBef>
-                <a:spcPts val="0"/>
-              </a:spcBef>
-            </a:pPr>
-            <a:r>
-              <a:rPr sz="1300" b="1" i="0">
+            <a:normAutofit/>
+          </a:bodyPr>
+          <a:lstStyle/>
+          <a:p>
+            <a:pPr algn="l">
+              <a:lnSpc>
+                <a:spcPct val="105000"/>
+              </a:lnSpc>
+              <a:spcBef>
+                <a:spcPts val="0"/>
+              </a:spcBef>
+            </a:pPr>
+            <a:r>
+              <a:rPr sz="1200" b="1" i="0">
                 <a:solidFill>
                   <a:srgbClr val="009B82"/>
                 </a:solidFill>
                 <a:latin typeface="Calibri"/>
               </a:rPr>
-              <a:t>ORGANIZATIONS REALIZING THIS</a:t>
+              <a:t>ORGANIZATIONS REALIZING THIS  ·  ADJACENCY — YC BATCHES VARY</a:t>
             </a:r>
           </a:p>
         </p:txBody>
@@ -35770,6 +35686,48 @@
         </p:nvSpPr>
         <p:spPr>
           <a:xfrm>
+            <a:off x="548640" y="5989320"/>
+            <a:ext cx="11094415" cy="384048"/>
+          </a:xfrm>
+          <a:prstGeom prst="rect">
+            <a:avLst/>
+          </a:prstGeom>
+          <a:noFill/>
+        </p:spPr>
+        <p:txBody>
+          <a:bodyPr wrap="square" anchor="t" lIns="0" rIns="0" tIns="0" bIns="0">
+            <a:normAutofit/>
+          </a:bodyPr>
+          <a:lstStyle/>
+          <a:p>
+            <a:pPr algn="l">
+              <a:lnSpc>
+                <a:spcPct val="105000"/>
+              </a:lnSpc>
+              <a:spcBef>
+                <a:spcPts val="0"/>
+              </a:spcBef>
+            </a:pPr>
+            <a:r>
+              <a:rPr sz="1050" b="0" i="1">
+                <a:solidFill>
+                  <a:srgbClr val="5B6B7C"/>
+                </a:solidFill>
+                <a:latin typeface="Calibri"/>
+              </a:rPr>
+              <a:t>Evidence note: counts tie out to 27 filtered companies; organization names are from the live YC listing, with deep-research notes confirming a 14-company subset. Adjacency examples span multiple YC batches.</a:t>
+            </a:r>
+          </a:p>
+        </p:txBody>
+      </p:sp>
+      <p:sp>
+        <p:nvSpPr>
+          <p:cNvPr id="30" name="TextBox 29"/>
+          <p:cNvSpPr txBox="1"/>
+          <p:nvPr/>
+        </p:nvSpPr>
+        <p:spPr>
+          <a:xfrm>
             <a:off x="548640" y="6473952"/>
             <a:ext cx="7315200" cy="274320"/>
           </a:xfrm>
@@ -35806,7 +35764,7 @@
       </p:sp>
       <p:sp>
         <p:nvSpPr>
-          <p:cNvPr id="30" name="TextBox 29"/>
+          <p:cNvPr id="31" name="TextBox 30"/>
           <p:cNvSpPr txBox="1"/>
           <p:nvPr/>
         </p:nvSpPr>
@@ -50549,7 +50507,7 @@
                 </a:solidFill>
                 <a:latin typeface="Calibri"/>
               </a:rPr>
-              <a:t>Healthcare ops and finance occupy the top-right — deep ownership and strong willingness to pay.</a:t>
+              <a:t>Healthcare ops and finance occupy the top-right — deep ownership and strong willingness to pay. (Illustrative positioning, not measured.)</a:t>
             </a:r>
           </a:p>
         </p:txBody>
